--- a/PROD-why-build-ai-on-azure.pptx
+++ b/PROD-why-build-ai-on-azure.pptx
@@ -2430,7 +2430,7 @@
             <a:r>
               <a:rPr lang="en-US" dirty="0"/>
               <a:t>[약 1.3분]
-바로 시작할 수 있는 대표 업무 여섯 개입니다. 보고서·리서치 자동 작성, 내부 지식 Q&amp;A 어시스턴트, 업무 프로세스 자동화, 전사 에이전트 관리·운영, 데이터 분석·인사이트, 그리고 개발 가속입니다. 표시된 것처럼 3번·5번은 Preview인 Work IQ·Fabric IQ가 관련되지만, 첫 번째 시나리오인 보고서·리서치 자동 작성은 이미 GA 서비스만으로 구현이 가능합니다. 그래서 저희는 보통 여기서 시작해 패턴을 확장하시길 권합니다.
+바로 시작할 수 있는 대표 업무 여섯 개입니다. 보고서·리서치 자동 작성, 내부 지식 Q&amp;A 어시스턴트, 업무 프로세스 자동화, 전사 에이전트 관리·운영, 데이터 분석·인사이트, 그리고 개발 가속입니다. 각 시나리오를 대표 서비스 중심으로 매핑했는데, Foundry·AI Search·Copilot Studio·Fabric·GitHub Copilot 같은 주요 서비스로 대부분 지금 바로 구현할 수 있습니다. 특히 첫 번째 보고서·리서치 자동 작성은 GA 서비스만으로 시작 가능하니, 저희는 보통 여기서 출발해 패턴을 확장하시길 권합니다.
 그럼 그 시작을 어떻게 단계적으로 밟는지, 로드맵을 보겠습니다.</a:t>
             </a:r>
             <a:endParaRPr lang="en-US" dirty="0"/>
@@ -28942,7 +28942,7 @@
                           <a:ea typeface="Apple SD Gothic Neo" pitchFamily="34" charset="-122"/>
                           <a:cs typeface="Apple SD Gothic Neo" pitchFamily="34" charset="-120"/>
                         </a:rPr>
-                        <a:t>Copilot Studio · Work IQ [Preview]</a:t>
+                        <a:t>Copilot Studio · Microsoft 365</a:t>
                       </a:r>
                       <a:endParaRPr lang="en-US" sz="1150" dirty="0">
                         <a:latin typeface="Apple SD Gothic Neo" charset="0"/>
@@ -29282,7 +29282,7 @@
                           <a:ea typeface="Apple SD Gothic Neo" pitchFamily="34" charset="-122"/>
                           <a:cs typeface="Apple SD Gothic Neo" pitchFamily="34" charset="-120"/>
                         </a:rPr>
-                        <a:t>Fabric · Fabric IQ [Preview]</a:t>
+                        <a:t>Microsoft Fabric · Foundry</a:t>
                       </a:r>
                       <a:endParaRPr lang="en-US" sz="1150" dirty="0">
                         <a:latin typeface="Apple SD Gothic Neo" charset="0"/>
@@ -29529,7 +29529,7 @@
                 <a:ea typeface="Apple SD Gothic Neo" pitchFamily="34" charset="-122"/>
                 <a:cs typeface="Apple SD Gothic Neo" pitchFamily="34" charset="-120"/>
               </a:rPr>
-              <a:t>대표 시나리오 #1은 이미 GA 서비스만으로 구현 가능 — 여기서 시작해 패턴을 확장합니다.</a:t>
+              <a:t>표의 핵심 서비스는 대부분 GA — 특히 #1 보고서·리서치는 지금 바로 시작해 패턴을 확장합니다.</a:t>
             </a:r>
             <a:endParaRPr lang="en-US" sz="1250" dirty="0"/>
           </a:p>

--- a/PROD-why-build-ai-on-azure.pptx
+++ b/PROD-why-build-ai-on-azure.pptx
@@ -624,7 +624,7 @@
             <a:r>
               <a:rPr lang="en-US" dirty="0"/>
               <a:t>[약 2분]
-AI 플랫폼을 고르실 때 이 여섯 가지를 체크리스트로 쓰시길 권합니다. 첫째 데이터 주권 — 데이터가 어디에 머무는가. Azure는 리전·테넌트 격리와 학습 미사용으로 답합니다. 둘째 보안 경계 — 조직 보안·ID 안에서 도는가. Entra·Purview·Defender죠. 셋째 모델 선택·운영 — 최신 모델을 바꿔 쓸 수 있나. Foundry 모델 카탈로그입니다. 넷째 거버넌스 — 누가 무엇을 쓰는지 통제되나. Agent 365와 Purview 감사입니다. 다섯째 통합 가치 — 이미 쓰는 시스템과 연결되나. M365·GitHub·Fabric 연동이고요. 여섯째 비용 예측성 — 확장할 때 비용이 통제되나. 관리형 서비스로 작게 시작해 확장합니다.
+AI 플랫폼을 고르실 때 이 여섯 가지를 체크리스트로 쓰시길 권합니다. 첫째 데이터 주권 — 데이터가 어디에 머무는가. Azure는 리전·테넌트 격리와 학습 미사용으로 답합니다. 둘째 보안 경계 — 조직 보안·ID 안에서 도는가. Microsoft Entra ID·Microsoft Purview·Microsoft Defender죠. 셋째 모델 선택·운영 — 최신 모델을 바꿔 쓸 수 있나. Microsoft Foundry 모델 카탈로그입니다. 넷째 거버넌스 — 누가 무엇을 쓰는지 통제되나. Microsoft Agent 365와 Microsoft Purview 감사입니다. 다섯째 통합 가치 — 이미 쓰는 시스템과 연결되나. Microsoft 365·GitHub·Microsoft Fabric 연동이고요. 여섯째 비용 예측성 — 확장할 때 비용이 통제되나. 관리형 서비스로 작게 시작해 확장합니다.
 어느 플랫폼을 검토하시든 이 여섯 기준으로 비교해 보시면 판단이 훨씬 명확해집니다. 다음은 이 모든 것을 관통하는 Azure의 관점을 짧게 정리하겠습니다.</a:t>
             </a:r>
             <a:endParaRPr lang="en-US" dirty="0"/>
@@ -985,7 +985,7 @@
             <a:r>
               <a:rPr lang="en-US" dirty="0"/>
               <a:t>[약 1.8분]
-에이전트를 '새로 합류한 디지털 직원'이라고 생각해 보십시오. 그러면 필요한 것이 분명해집니다. 직원에게 업무 지식이 필요하듯 에이전트에겐 데이터·온톨로지 이해가 필요하고, 이건 Fabric·OneLake와 세 개의 IQ가 제공합니다. 일할 도구는 Foundry Tools와 커넥터로, 판단·실행을 위한 모델은 Foundry 모델 카탈로그로 얻습니다. 소속과 권한은 Entra Agent ID로 부여하고, 성과·안전 관리는 Purview·Defender와 평가로 합니다. 채용·교육·근무·인사관리가 그대로 대응되는 거죠.
+에이전트를 '새로 합류한 디지털 직원'이라고 생각해 보십시오. 그러면 필요한 것이 분명해집니다. 직원에게 업무 지식이 필요하듯 에이전트에겐 데이터·온톨로지 이해가 필요하고, 이건 Microsoft Fabric·OneLake와 세 개의 IQ가 제공합니다. 일할 도구는 Microsoft Foundry Tools와 커넥터로, 판단·실행을 위한 모델은 Microsoft Foundry 모델 카탈로그로 얻습니다. 소속과 권한은 Microsoft Entra Agent ID로 부여하고, 성과·안전 관리는 Microsoft Purview·Microsoft Defender와 평가로 합니다. 채용·교육·근무·인사관리가 그대로 대응되는 거죠.
 다만 반드시 강조드릴 점은 — 최종 책임과 권한은 사람에게 있고, 에이전트는 그 통제·감사 체계 안에서 움직인다는 것입니다. 그리고 그 모든 걸 Azure가 한 기반에서 제공합니다.
 그럼 이 이야기의 '근거'가 되는 실제 플랫폼을, 파트 3에서 구체적으로 보겠습니다.</a:t>
             </a:r>
@@ -1165,7 +1165,7 @@
             <a:r>
               <a:rPr lang="en-US" dirty="0"/>
               <a:t>[약 1.5분]
-Enterprise AI Platform을 완성하는 핵심 서비스는 여섯 개입니다. 데이터 기반의 Microsoft Fabric·OneLake, 의미를 이해하는 지능 레이어인 세 개의 IQ와 Azure AI Search, 에이전트를 만들고 운영하는 Microsoft Foundry, 현업이 코드 없이 에이전트를 만드는 Copilot Studio, 일하는 현장에 통합되는 Microsoft 365·Agent 365, 그리고 개발 생태계인 GitHub Copilot입니다.
+Enterprise AI Platform을 완성하는 핵심 서비스는 여섯 개입니다. 데이터 기반의 Microsoft Fabric·OneLake, 의미를 이해하는 지능 레이어인 세 개의 IQ와 Azure AI Search, 에이전트를 만들고 운영하는 Microsoft Foundry, 현업이 코드 없이 에이전트를 만드는 Microsoft Copilot Studio, 일하는 현장에 통합되는 Microsoft 365·Microsoft Agent 365, 그리고 개발 생태계인 GitHub Copilot입니다.
 여기서 정확히 말씀드릴 점 하나 — 세 개의 IQ, 즉 Fabric IQ·Work IQ·Foundry IQ는 아직 Preview 단계입니다. 발표 시점 기준 GA 여부와 한국 리전 지원은 꼭 재확인하시길 권합니다. 나머지는 대부분 GA입니다.
 이제 각 서비스를 데이터부터 순서대로 보겠습니다.</a:t>
             </a:r>
@@ -1346,7 +1346,7 @@
             <a:r>
               <a:rPr lang="en-US" dirty="0"/>
               <a:t>[약 2분]
-데이터가 모였다고 AI가 바로 잘 쓰는 건 아닙니다. 데이터가 '무엇을 뜻하는지' 의미를 알아야 하죠. 그 역할을 세 개의 IQ가 나눠 맡습니다. Fabric IQ는 테이블·컬럼이 무엇을 뜻하는지 데이터의 의미를, Work IQ는 M365 속 업무·협업의 맥락을, Foundry IQ는 에이전트가 참조할 지식을 관리합니다. 이 셋이 합쳐지면 '데이터 + 업무 + 지식'을 모두 아는, 비즈니스를 이해하는 지능이 됩니다.
+데이터가 모였다고 AI가 바로 잘 쓰는 건 아닙니다. 데이터가 '무엇을 뜻하는지' 의미를 알아야 하죠. 그 역할을 세 개의 IQ가 나눠 맡습니다. Fabric IQ는 테이블·컬럼이 무엇을 뜻하는지 데이터의 의미를, Work IQ는 Microsoft 365 속 업무·협업의 맥락을, Foundry IQ는 에이전트가 참조할 지식을 관리합니다. 이 셋이 합쳐지면 '데이터 + 업무 + 지식'을 모두 아는, 비즈니스를 이해하는 지능이 됩니다.
 다시 한 번, 이 세 IQ는 Preview 단계라는 점 기억해 주십시오. 그리고 이 지능을 아래에서 떠받치는 게 Azure AI Search입니다. 이건 GA이고, 검색·검색증강(RAG) 엔진으로 에이전트가 정확한 근거를 찾도록 해서 환각을 줄입니다.
 의미를 알게 됐으니, 이제 이걸 실제 에이전트로 만드는 '공장'을 보겠습니다.</a:t>
             </a:r>
@@ -1437,7 +1437,7 @@
             <a:r>
               <a:rPr lang="en-US" dirty="0"/>
               <a:t>[약 1.5분]
-Microsoft Foundry는 AI 앱과 에이전트를 만들고 운영하는 통합 플랫폼입니다. 중요한 건 '실험'이 아니라 '운영'을 전제로 설계됐다는 점입니다. 네 가지가 한 곳에 있습니다. 모델 카탈로그로 OpenAI 프론티어부터 오픈 모델까지 골라 쓰고, Agent Service로 에이전트를 만들고 배포하며, 평가와 Observability로 품질·안전을 지속 측정하고, Content Safety로 안전 가드레일을 내장합니다.
+Microsoft Foundry는 AI 앱과 에이전트를 만들고 운영하는 통합 플랫폼입니다. 중요한 건 '실험'이 아니라 '운영'을 전제로 설계됐다는 점입니다. 네 가지가 한 곳에 있습니다. 모델 카탈로그로 OpenAI 프론티어부터 오픈 모델까지 골라 쓰고, Agent Service로 에이전트를 만들고 배포하며, 평가와 Observability로 품질·안전을 지속 측정하고, Azure AI Content Safety로 안전 가드레일을 내장합니다.
 모델 선택부터 개발, 평가, 안전까지 한 곳에서 — 그래서 저는 이걸 에이전트를 '운영'하는 공장이라고 부릅니다. GA 서비스입니다.
 이제 만든 에이전트를 어디서 만들고, 어디서 일하게 하고, 어떻게 개발 생산성을 높이는지 세 서비스를 묶어 보겠습니다.</a:t>
             </a:r>
@@ -1618,7 +1618,7 @@
             <a:r>
               <a:rPr lang="en-US" dirty="0"/>
               <a:t>[약 1.8분]
-세 서비스가 각각 '만들고, 일하고, 개발하는' 역할을 맡습니다. 넷째 Copilot Studio는 현업·IT를 위한 에이전트 빌더입니다. 코드 없이 업무 에이전트를 만들고 M365·Teams로 바로 게시하며 Foundry와 상호운용됩니다. 다섯째 Microsoft 365·Agent 365는 일하는 현장의 에이전트입니다. Teams·Outlook 같은 업무 흐름 안에서 에이전트를 쓰고, Agent 365로 전사의 에이전트를 관리·운영하며 Entra·Purview로 통제합니다. Agent 365는 2026년 5월 GA 예정입니다. 여섯째 GitHub Copilot은 에이전트를 만드는 개발 생산성입니다. 세계 최대 개발 생태계 위에서 코딩 에이전트로 개발을 가속하고 Foundry와 함께 앱·에이전트를 구축합니다.
+세 서비스가 각각 '만들고, 일하고, 개발하는' 역할을 맡습니다. 넷째 Microsoft Copilot Studio는 현업·IT를 위한 에이전트 빌더입니다. 코드 없이 업무 에이전트를 만들고 Microsoft 365·Microsoft Teams로 바로 게시하며 Microsoft Foundry와 상호운용됩니다. 다섯째 Microsoft 365·Microsoft Agent 365는 일하는 현장의 에이전트입니다. Microsoft Teams·Outlook 같은 업무 흐름 안에서 에이전트를 쓰고, Microsoft Agent 365로 전사의 에이전트를 관리·운영하며 Microsoft Entra ID·Microsoft Purview로 통제합니다. Microsoft Agent 365는 2026년 5월 GA 예정입니다. 여섯째 GitHub Copilot은 에이전트를 만드는 개발 생산성입니다. 세계 최대 개발 생태계 위에서 코딩 에이전트로 개발을 가속하고 Microsoft Foundry와 함께 앱·에이전트를 구축합니다.
 여기까지가 개별 서비스였고, 이제 이 서비스들이 어떻게 하나의 아키텍처로 쌓이는지 전체 그림을 보겠습니다.</a:t>
             </a:r>
             <a:endParaRPr lang="en-US" dirty="0"/>
@@ -1708,8 +1708,8 @@
             <a:r>
               <a:rPr lang="en-US" dirty="0"/>
               <a:t>[약 2분]
-이 그림 한 장이 오늘 발표의 뼈대입니다. 아래에서 위로 읽으시면 됩니다. 맨 아래 Data 계층에서 100개 넘는 커넥터와 Shortcut으로 데이터 원천을 연결하고, OneLake에서 단일 데이터 레이크로 통합합니다. 그 위 Ontology·Intelligence 계층에서 세 개의 IQ와 AI Search가 의미를 부여하고, Agent Factory에서 Copilot Studio와 Foundry로 에이전트를 만듭니다. 그렇게 만든 에이전트가 Agents 계층에서 동작하고, 맨 위 Experience 계층에서 M365·Teams를 통해 사용자와 만납니다. 즉 데이터가 위로 올라가며 '지능 → 에이전트 → 경험'으로 실현되는 구조죠.
-그리고 오른쪽을 보시면 Governance &amp; Security가 이 여섯 계층 전체를 세로로 관통합니다 — Entra·Purview·Defender·Monitor로요. 보안이 한 층이 아니라 전 계층에 걸쳐 있다는 게 핵심입니다.
+이 그림 한 장이 오늘 발표의 뼈대입니다. 아래에서 위로 읽으시면 됩니다. 맨 아래 Data 계층에서 100개 넘는 커넥터와 Shortcut으로 데이터 원천을 연결하고, OneLake에서 단일 데이터 레이크로 통합합니다. 그 위 Ontology·Intelligence 계층에서 세 개의 IQ와 Azure AI Search가 의미를 부여하고, Agent Factory에서 Microsoft Copilot Studio와 Microsoft Foundry로 에이전트를 만듭니다. 그렇게 만든 에이전트가 Agents 계층에서 동작하고, 맨 위 Experience 계층에서 Microsoft 365·Microsoft Teams를 통해 사용자와 만납니다. 즉 데이터가 위로 올라가며 '지능 → 에이전트 → 경험'으로 실현되는 구조죠.
+그리고 오른쪽을 보시면 Governance &amp; Security가 이 여섯 계층 전체를 세로로 관통합니다 — Microsoft Entra ID·Microsoft Purview·Microsoft Defender·Azure Monitor로요. 보안이 한 층이 아니라 전 계층에 걸쳐 있다는 게 핵심입니다.
 같은 흐름을 '데이터의 여정'으로 한 번 더 정리해 보겠습니다.</a:t>
             </a:r>
             <a:endParaRPr lang="en-US" dirty="0"/>
@@ -1799,7 +1799,7 @@
             <a:r>
               <a:rPr lang="en-US" dirty="0"/>
               <a:t>[약 1.2분]
-방금 아키텍처를 데이터 입장에서 여섯 단계로 풀면 이렇습니다. 수집 — 흩어진 원천을 연결하고, 통합 — OneLake로 하나의 레이크를 만들고, 의미 부여 — 온톨로지와 세 IQ로 의미화하고, 에이전트화 — Foundry·Copilot Studio로 제작하고, 실행 — 업무 현장에서 자동화하고, 마지막으로 통제 — Governance로 상시 관측합니다.
+방금 아키텍처를 데이터 입장에서 여섯 단계로 풀면 이렇습니다. 수집 — 흩어진 원천을 연결하고, 통합 — OneLake로 하나의 레이크를 만들고, 의미 부여 — 온톨로지와 세 IQ로 의미화하고, 에이전트화 — Microsoft Foundry·Microsoft Copilot Studio로 제작하고, 실행 — 업무 현장에서 자동화하고, 마지막으로 통제 — Governance로 상시 관측합니다.
 데이터가 원천에서 성과까지 어떻게 흘러가는지를 한 줄로 보여드리는 장입니다. 다음은 각 계층을 '비즈니스 가치'와 '실현 서비스'로 나란히 정리한 표입니다.</a:t>
             </a:r>
             <a:endParaRPr lang="en-US" dirty="0"/>
@@ -1889,7 +1889,7 @@
             <a:r>
               <a:rPr lang="en-US" dirty="0"/>
               <a:t>[약 1분]
-이 표는 각 계층을 두 가지 관점으로 봅니다 — 왼쪽은 '무엇을 위한 것인가'라는 비즈니스 가치, 오른쪽은 '무엇으로 실현하는가'라는 Azure 서비스입니다. 예를 들어 Experience는 일하는 곳에서 바로 쓰는 경험이고 M365·Teams로 실현되며, Agents는 업무를 대신 실행하는 디지털 직원이고 Foundry Agent Service로 구현됩니다. 가치부터 보고 서비스로 내려오는 순서로 읽으시면 됩니다.
+이 표는 각 계층을 두 가지 관점으로 봅니다 — 왼쪽은 '무엇을 위한 것인가'라는 비즈니스 가치, 오른쪽은 '무엇으로 실현하는가'라는 Azure 서비스입니다. 예를 들어 Experience는 일하는 곳에서 바로 쓰는 경험이고 Microsoft 365·Microsoft Teams로 실현되며, Agents는 업무를 대신 실행하는 디지털 직원이고 Microsoft Foundry Agent Service로 구현됩니다. 가치부터 보고 서비스로 내려오는 순서로 읽으시면 됩니다.
 이제 이 플랫폼 위에서 '개발' 자체가 어떻게 빨라지는지 보겠습니다.</a:t>
             </a:r>
             <a:endParaRPr lang="en-US" dirty="0"/>
@@ -2069,7 +2069,7 @@
             <a:r>
               <a:rPr lang="en-US" dirty="0"/>
               <a:t>[약 1.5분]
-거버넌스는 특정 계층이 아니라 전 계층을 가로지릅니다. Responsible AI를 '원칙'이 아니라 실제 '동작'으로 만드는 네 개의 축입니다. Entra Agent ID는 에이전트에게도 신원과 권한을 부여하고 통제합니다. Purview는 민감정보 분류와 데이터 정책, 감사를 담당하고, Defender는 AI 워크로드의 위협을 탐지·대응하며, Azure Monitor는 성능·품질·안전을 지속 관측합니다.
+거버넌스는 특정 계층이 아니라 전 계층을 가로지릅니다. Responsible AI를 '원칙'이 아니라 실제 '동작'으로 만드는 네 개의 축입니다. Microsoft Entra Agent ID는 에이전트에게도 신원과 권한을 부여하고 통제합니다. Microsoft Purview는 민감정보 분류와 데이터 정책, 감사를 담당하고, Microsoft Defender는 AI 워크로드의 위협을 탐지·대응하며, Azure Monitor는 성능·품질·안전을 지속 관측합니다.
 특히 강조드리고 싶은 건 — 이 네 가지는 모두 GA라는 점입니다. 미래의 약속이 아니라, 지금 바로 표준 거버넌스로 시작하실 수 있습니다.
 다음 장에서 지금까지의 서비스를 성숙도까지 포함해 한 표로 총정리하겠습니다.</a:t>
             </a:r>
@@ -2160,7 +2160,7 @@
             <a:r>
               <a:rPr lang="en-US" dirty="0"/>
               <a:t>[약 50초]
-이 표는 계층별 핵심 서비스와 성숙도를 한눈에 정리한 참조용 슬라이드입니다. 보시다시피 경험·에이전트 제작·검색·데이터·개발·거버넌스 대부분이 GA이고, Agent 365는 2026년 5월 GA 예정입니다. 유일하게 Preview인 것이 세 개의 IQ입니다. 그래서 다시 한 번 — Fabric IQ·Work IQ·Foundry IQ는 발표 시점에 GA 여부와 한국 리전을 재확인하시길 권합니다. 나머지는 지금 GA로 시작 가능합니다.
+이 표는 계층별 핵심 서비스와 성숙도를 한눈에 정리한 참조용 슬라이드입니다. 보시다시피 경험·에이전트 제작·검색·데이터·개발·거버넌스 대부분이 GA이고, Microsoft Agent 365는 2026년 5월 GA 예정입니다. 유일하게 Preview인 것이 세 개의 IQ입니다. 그래서 다시 한 번 — Fabric IQ·Work IQ·Foundry IQ는 발표 시점에 GA 여부와 한국 리전을 재확인하시길 권합니다. 나머지는 지금 GA로 시작 가능합니다.
 여기까지가 '근거'였고, 이제 마지막 파트 4 — 그래서 무엇부터 하느냐로 넘어가겠습니다.</a:t>
             </a:r>
             <a:endParaRPr lang="en-US" dirty="0"/>
@@ -2339,7 +2339,7 @@
             <a:r>
               <a:rPr lang="en-US" dirty="0"/>
               <a:t>[약 1.5분]
-이 플랫폼이 역할별로 무엇을 주는지 보겠습니다. 경영진께는 KPI·리스크를 한눈에 보는 성과 가시성을, 현업 담당자께는 Copilot Studio로 직접 만드는 반복업무 자동화를 드립니다. 개발자는 GitHub Copilot·Foundry로 개발 생산성을 얻고, IT·보안 조직은 Entra·Purview로 '통제 가능한 확산'을 얻습니다.
+이 플랫폼이 역할별로 무엇을 주는지 보겠습니다. 경영진께는 KPI·리스크를 한눈에 보는 성과 가시성을, 현업 담당자께는 Microsoft Copilot Studio로 직접 만드는 반복업무 자동화를 드립니다. 개발자는 GitHub Copilot·Microsoft Foundry로 개발 생산성을 얻고, IT·보안 조직은 Microsoft Entra ID·Microsoft Purview로 '통제 가능한 확산'을 얻습니다.
 여기서 중요한 균형이 있습니다 — 현업의 자율성과 IT의 통제가 충돌하지 않고, 한 플랫폼 안에서 양립한다는 점입니다.
 그럼 실제 어떤 업무부터 시작할 수 있는지 시나리오로 보겠습니다.</a:t>
             </a:r>
@@ -2430,7 +2430,7 @@
             <a:r>
               <a:rPr lang="en-US" dirty="0"/>
               <a:t>[약 1.3분]
-바로 시작할 수 있는 대표 업무 여섯 개입니다. 보고서·리서치 자동 작성, 내부 지식 Q&amp;A 어시스턴트, 업무 프로세스 자동화, 전사 에이전트 관리·운영, 데이터 분석·인사이트, 그리고 개발 가속입니다. 각 시나리오를 대표 서비스 중심으로 매핑했는데, Foundry·AI Search·Copilot Studio·Fabric·GitHub Copilot 같은 주요 서비스로 대부분 지금 바로 구현할 수 있습니다. 특히 첫 번째 보고서·리서치 자동 작성은 GA 서비스만으로 시작 가능하니, 저희는 보통 여기서 출발해 패턴을 확장하시길 권합니다.
+바로 시작할 수 있는 대표 업무 여섯 개입니다. 보고서·리서치 자동 작성, 내부 지식 Q&amp;A 어시스턴트, 업무 프로세스 자동화, 전사 에이전트 관리·운영, 데이터 분석·인사이트, 그리고 개발 가속입니다. 각 시나리오를 대표 서비스 중심으로 매핑했는데, Microsoft Foundry·Azure AI Search·Microsoft Copilot Studio·Microsoft Fabric·GitHub Copilot 같은 주요 서비스로 대부분 지금 바로 구현할 수 있습니다. 특히 첫 번째 보고서·리서치 자동 작성은 GA 서비스만으로 시작 가능하니, 저희는 보통 여기서 출발해 패턴을 확장하시길 권합니다.
 그럼 그 시작을 어떻게 단계적으로 밟는지, 로드맵을 보겠습니다.</a:t>
             </a:r>
             <a:endParaRPr lang="en-US" dirty="0"/>
@@ -2609,7 +2609,7 @@
             <a:r>
               <a:rPr lang="en-US" dirty="0"/>
               <a:t>[약 1.8분]
-도입은 네 단계로, 작게 시작해 안전하게 확장합니다. 1단계 Envision, 0~2주 — ROI가 높은 한 업무를 정하고 데이터·보안 요건을 정리합니다. 2단계 Pilot, 2~6주 — GA 서비스만으로 대표 시나리오 하나를 실제로 구현·검증합니다. 3단계 Scale, 6주 이후 — 검증된 패턴을 인접 업무로 넓힙니다. 4단계 Govern은 상시로, Entra·Purview·Defender로 통제·관측을 정착시킵니다.
+도입은 네 단계로, 작게 시작해 안전하게 확장합니다. 1단계 Envision, 0~2주 — ROI가 높은 한 업무를 정하고 데이터·보안 요건을 정리합니다. 2단계 Pilot, 2~6주 — GA 서비스만으로 대표 시나리오 하나를 실제로 구현·검증합니다. 3단계 Scale, 6주 이후 — 검증된 패턴을 인접 업무로 넓힙니다. 4단계 Govern은 상시로, Microsoft Entra ID·Microsoft Purview·Microsoft Defender로 통제·관측을 정착시킵니다.
 아래 Quick Win 박스가 실무적으로 중요합니다 — 워크숍에 딱 세 가지만 준비해 오시면 됩니다. 데이터 소스 2개, 보안 요구사항, 그리고 ROI 후보 업무 1개. 이것만 있으면 바로 파일럿 설계를 시작할 수 있습니다.
 이제 오늘 내용을 일곱 가지로 압축하겠습니다.</a:t>
             </a:r>
@@ -2973,7 +2973,7 @@
               <a:t>[약 2분]
 왼쪽 표를 보시면 변화가 분명합니다. 사람이 직접 처리하던 업무를 에이전트가 대신 실행하고, 사람이 도구를 조작하던 걸 에이전트가 API로 직접 호출합니다. 확장은 인력 증원이 아니라 에이전트 확장으로, 업무시간에 묶여 있던 처리 속도가 24시간 상시 실행으로 바뀝니다.
 그런데 'AI가 좋은 건 알겠는데 왜 하필 지금이냐'고 물으실 수 있습니다. 오른쪽 네 가지 압력 때문입니다. 첫째 프론티어 모델이 복잡한 업무를 맡길 수준으로 성숙했고, 둘째 경쟁사의 도입 격차가 곧 시장 격차로 벌어지고 있습니다. 셋째 데이터 준비를 미룰수록 부채처럼 비용이 쌓이고, 넷째 이미 현장에는 통제 밖의 Shadow AI 사용이 시작됐습니다.
-그리고 핵심은 — 이미 M365·GitHub·Fabric을 쓰고 계시다면, '지금' 시작하기 가장 가까운 곳이 바로 그 위에 얹히는 Azure라는 점입니다.
+그리고 핵심은 — 이미 Microsoft 365·GitHub·Microsoft Fabric을 쓰고 계시다면, '지금' 시작하기 가장 가까운 곳이 바로 그 위에 얹히는 Azure라는 점입니다.
 그럼 실제 도입을 막는 벽들을 보겠습니다.</a:t>
             </a:r>
             <a:endParaRPr lang="en-US" dirty="0"/>
@@ -3153,8 +3153,8 @@
             <a:r>
               <a:rPr lang="en-US" dirty="0"/>
               <a:t>[약 2분]
-Azure를 신뢰할 수 있는 근거를 네 가지로 정리했습니다. 첫째 AI 리더십 — 프론티어 모델인 OpenAI부터 오픈 모델까지, Microsoft Foundry 모델 카탈로그에서 안전하게 골라 운영합니다. 둘째 Responsible AI — 안전·책임이 나중에 붙는 게 아니라 설계부터 내장돼 있고, Content Safety·Entra·Purview·Defender로 뒷받침됩니다. 셋째 End-to-End 완결 스택 — 데이터부터 에이전트, 운영까지 하나의 스택에서 이어집니다. 넷째 개발자 생태계 — 이미 많은 조직이 쓰는 GitHub 위에서 앱과 에이전트를 바로 구축·운영합니다.
-그리고 이 네 가지가 특히 강해지는 지점이 있습니다. 이미 M365·Entra·GitHub·Fabric을 쓰고 계신 조직에겐, 이것들이 '새로 만드는 것'이 아니라 '쓰던 것' 위에 안전하게 얹힌다는 점입니다.
+Azure를 신뢰할 수 있는 근거를 네 가지로 정리했습니다. 첫째 AI 리더십 — 프론티어 모델인 OpenAI부터 오픈 모델까지, Microsoft Foundry 모델 카탈로그에서 안전하게 골라 운영합니다. 둘째 Responsible AI — 안전·책임이 나중에 붙는 게 아니라 설계부터 내장돼 있고, Azure AI Content Safety·Microsoft Entra ID·Microsoft Purview·Microsoft Defender로 뒷받침됩니다. 셋째 End-to-End 완결 스택 — 데이터부터 에이전트, 운영까지 하나의 스택에서 이어집니다. 넷째 개발자 생태계 — 이미 많은 조직이 쓰는 GitHub 위에서 앱과 에이전트를 바로 구축·운영합니다.
+그리고 이 네 가지가 특히 강해지는 지점이 있습니다. 이미 Microsoft 365·Microsoft Entra ID·GitHub·Microsoft Fabric을 쓰고 계신 조직에겐, 이것들이 '새로 만드는 것'이 아니라 '쓰던 것' 위에 안전하게 얹힌다는 점입니다.
 다만 이런 얘기는 다소 추상적으로 들릴 수 있죠. 그래서 다음 장에서 '구체적으로 무엇이 다른가'를 보여드리겠습니다.</a:t>
             </a:r>
             <a:endParaRPr lang="en-US" dirty="0"/>
@@ -3244,7 +3244,7 @@
             <a:r>
               <a:rPr lang="en-US" dirty="0"/>
               <a:t>[약 2분]
-'신뢰할 수 있다'를 구체적인 네 가지로 풀면 이렇습니다. 첫째, 데이터는 여러분의 것입니다. 고객의 입력·출력을 파운데이션 모델 학습에 사용하지 않는 것을 원칙으로 하고, 한국 리전을 우선 설계하며 테넌트 격리를 적용합니다. 다만 데이터 상주·약관은 서비스·모델별로 확인이 필요하다는 점은 정확히 말씀드립니다. 둘째, 모델 선택의 자유 — Foundry 모델 카탈로그에서 프론티어·오픈소스·산업별 모델을 운영 가능한 방식으로 바꿔 씁니다. 셋째, 이미 가진 스택 위에서 — M365·GitHub·Fabric은 연동 가치로 얹히고, 이 기준을 실제로 책임지는 엔진은 Azure입니다. 원본을 옮기지 않고 '연결'부터 시작합니다. 넷째, AI를 감싸는 보안·거버넌스 — Entra·Purview·Defender, 그리고 에이전트 통제를 위한 Agent 365가 전 계층을 관통합니다. Agent 365는 2026년 5월 GA 예정입니다.
+'신뢰할 수 있다'를 구체적인 네 가지로 풀면 이렇습니다. 첫째, 데이터는 여러분의 것입니다. 고객의 입력·출력을 파운데이션 모델 학습에 사용하지 않는 것을 원칙으로 하고, 한국 리전을 우선 설계하며 테넌트 격리를 적용합니다. 다만 데이터 상주·약관은 서비스·모델별로 확인이 필요하다는 점은 정확히 말씀드립니다. 둘째, 모델 선택의 자유 — Microsoft Foundry 모델 카탈로그에서 프론티어·오픈소스·산업별 모델을 운영 가능한 방식으로 바꿔 씁니다. 셋째, 이미 가진 스택 위에서 — Microsoft 365·GitHub·Microsoft Fabric은 연동 가치로 얹히고, 이 기준을 실제로 책임지는 엔진은 Azure입니다. 원본을 옮기지 않고 '연결'부터 시작합니다. 넷째, AI를 감싸는 보안·거버넌스 — Microsoft Entra ID·Microsoft Purview·Microsoft Defender, 그리고 에이전트 통제를 위한 Microsoft Agent 365가 전 계층을 관통합니다. Microsoft Agent 365는 2026년 5월 GA 예정입니다.
 결국 핵심은 '어디서 구축·운영하느냐'입니다. 이제 신뢰의 토대인 Responsible AI를 조금 더 보겠습니다.</a:t>
             </a:r>
             <a:endParaRPr lang="en-US" dirty="0"/>
@@ -3334,7 +3334,7 @@
             <a:r>
               <a:rPr lang="en-US" dirty="0"/>
               <a:t>[약 1.5분]
-Microsoft의 Responsible AI는 슬로건이 아니라 다섯 개의 설계 원칙으로 제품에 구현돼 있습니다. 공정성은 모델 평가·편향 탐지 도구로, 신뢰성·안전은 Content Safety와 평가 파이프라인으로 확인합니다. 개인정보·보안은 앞서 말씀드린 데이터 학습 미사용과 리전 격리로 지키고, 투명성은 추적·관측으로, 책임성은 Entra·Purview·Defender 연동으로 거버넌스와 통제를 겁니다.
+Microsoft의 Responsible AI는 슬로건이 아니라 다섯 개의 설계 원칙으로 제품에 구현돼 있습니다. 공정성은 모델 평가·편향 탐지 도구로, 신뢰성·안전은 Azure AI Content Safety와 평가 파이프라인으로 확인합니다. 개인정보·보안은 앞서 말씀드린 데이터 학습 미사용과 리전 격리로 지키고, 투명성은 추적·관측으로, 책임성은 Microsoft Entra ID·Microsoft Purview·Microsoft Defender 연동으로 거버넌스와 통제를 겁니다.
 다시 한 번 정확히 말씀드리면, 고객 데이터로 파운데이션 모델을 학습하지 않으며, 서비스·모델·리전별 조건을 확인한 전제에서 테넌트·리전 격리 원칙을 적용합니다.
 이 원칙들이 실제 의사결정 기준으로 어떻게 이어지는지, 다음 장의 여섯 가지 판단 기준에서 정리하겠습니다.</a:t>
             </a:r>
@@ -4730,7 +4730,7 @@
                 <a:ea typeface="Apple SD Gothic Neo" pitchFamily="34" charset="-122"/>
                 <a:cs typeface="Apple SD Gothic Neo" pitchFamily="34" charset="-120"/>
               </a:rPr>
-              <a:t>Entra · Purview · Defender</a:t>
+              <a:t>Microsoft Entra ID · Microsoft Purview · Microsoft Defender</a:t>
             </a:r>
             <a:endParaRPr lang="en-US" sz="1000" dirty="0"/>
           </a:p>
@@ -5009,7 +5009,7 @@
                 <a:ea typeface="Apple SD Gothic Neo" pitchFamily="34" charset="-122"/>
                 <a:cs typeface="Apple SD Gothic Neo" pitchFamily="34" charset="-120"/>
               </a:rPr>
-              <a:t>Foundry 모델 카탈로그</a:t>
+              <a:t>Microsoft Foundry 모델 카탈로그</a:t>
             </a:r>
             <a:endParaRPr lang="en-US" sz="1000" dirty="0"/>
           </a:p>
@@ -5288,7 +5288,7 @@
                 <a:ea typeface="Apple SD Gothic Neo" pitchFamily="34" charset="-122"/>
                 <a:cs typeface="Apple SD Gothic Neo" pitchFamily="34" charset="-120"/>
               </a:rPr>
-              <a:t>Agent 365 · Purview 감사</a:t>
+              <a:t>Microsoft Agent 365 · Microsoft Purview 감사</a:t>
             </a:r>
             <a:endParaRPr lang="en-US" sz="1000" dirty="0"/>
           </a:p>
@@ -5567,7 +5567,7 @@
                 <a:ea typeface="Apple SD Gothic Neo" pitchFamily="34" charset="-122"/>
                 <a:cs typeface="Apple SD Gothic Neo" pitchFamily="34" charset="-120"/>
               </a:rPr>
-              <a:t>M365 · GitHub · Fabric 연동</a:t>
+              <a:t>Microsoft 365 · GitHub · Microsoft Fabric 연동</a:t>
             </a:r>
             <a:endParaRPr lang="en-US" sz="1000" dirty="0"/>
           </a:p>
@@ -9137,7 +9137,7 @@
                           <a:ea typeface="Apple SD Gothic Neo" pitchFamily="34" charset="-122"/>
                           <a:cs typeface="Apple SD Gothic Neo" pitchFamily="34" charset="-120"/>
                         </a:rPr>
-                        <a:t>Fabric · OneLake · 3개 IQ</a:t>
+                        <a:t>Microsoft Fabric · OneLake · 3개 IQ</a:t>
                       </a:r>
                       <a:endParaRPr lang="en-US" sz="1200" dirty="0">
                         <a:latin typeface="Apple SD Gothic Neo" charset="0"/>
@@ -9307,7 +9307,7 @@
                           <a:ea typeface="Apple SD Gothic Neo" pitchFamily="34" charset="-122"/>
                           <a:cs typeface="Apple SD Gothic Neo" pitchFamily="34" charset="-120"/>
                         </a:rPr>
-                        <a:t>Foundry Tools · 커넥터</a:t>
+                        <a:t>Microsoft Foundry Tools · 커넥터</a:t>
                       </a:r>
                       <a:endParaRPr lang="en-US" sz="1200" dirty="0">
                         <a:latin typeface="Apple SD Gothic Neo" charset="0"/>
@@ -9477,7 +9477,7 @@
                           <a:ea typeface="Apple SD Gothic Neo" pitchFamily="34" charset="-122"/>
                           <a:cs typeface="Apple SD Gothic Neo" pitchFamily="34" charset="-120"/>
                         </a:rPr>
-                        <a:t>Foundry 모델 카탈로그</a:t>
+                        <a:t>Microsoft Foundry 모델 카탈로그</a:t>
                       </a:r>
                       <a:endParaRPr lang="en-US" sz="1200" dirty="0">
                         <a:latin typeface="Apple SD Gothic Neo" charset="0"/>
@@ -9647,7 +9647,7 @@
                           <a:ea typeface="Apple SD Gothic Neo" pitchFamily="34" charset="-122"/>
                           <a:cs typeface="Apple SD Gothic Neo" pitchFamily="34" charset="-120"/>
                         </a:rPr>
-                        <a:t>Entra Agent ID</a:t>
+                        <a:t>Microsoft Entra Agent ID</a:t>
                       </a:r>
                       <a:endParaRPr lang="en-US" sz="1200" dirty="0">
                         <a:latin typeface="Apple SD Gothic Neo" charset="0"/>
@@ -9817,7 +9817,7 @@
                           <a:ea typeface="Apple SD Gothic Neo" pitchFamily="34" charset="-122"/>
                           <a:cs typeface="Apple SD Gothic Neo" pitchFamily="34" charset="-120"/>
                         </a:rPr>
-                        <a:t>Purview · Defender · 평가</a:t>
+                        <a:t>Microsoft Purview · Microsoft Defender · 평가</a:t>
                       </a:r>
                       <a:endParaRPr lang="en-US" sz="1200" dirty="0">
                         <a:latin typeface="Apple SD Gothic Neo" charset="0"/>
@@ -11404,7 +11404,7 @@
                 <a:ea typeface="Apple SD Gothic Neo" pitchFamily="34" charset="-122"/>
                 <a:cs typeface="Apple SD Gothic Neo" pitchFamily="34" charset="-120"/>
               </a:rPr>
-              <a:t>Copilot Studio</a:t>
+              <a:t>Microsoft Copilot Studio</a:t>
             </a:r>
             <a:endParaRPr lang="en-US" sz="1400" dirty="0"/>
           </a:p>
@@ -11666,7 +11666,7 @@
                 <a:ea typeface="Apple SD Gothic Neo" pitchFamily="34" charset="-122"/>
                 <a:cs typeface="Apple SD Gothic Neo" pitchFamily="34" charset="-120"/>
               </a:rPr>
-              <a:t>Microsoft 365 · Agent 365</a:t>
+              <a:t>Microsoft 365 · Microsoft Agent 365</a:t>
             </a:r>
             <a:endParaRPr lang="en-US" sz="1400" dirty="0"/>
           </a:p>
@@ -13679,7 +13679,7 @@
                 <a:ea typeface="Apple SD Gothic Neo" pitchFamily="34" charset="-122"/>
                 <a:cs typeface="Apple SD Gothic Neo" pitchFamily="34" charset="-120"/>
               </a:rPr>
-              <a:t>M365 속 업무·협업의 흐름을 이해</a:t>
+              <a:t>Microsoft 365 속 업무·협업의 흐름을 이해</a:t>
             </a:r>
             <a:endParaRPr lang="en-US" sz="1100" dirty="0"/>
           </a:p>
@@ -15045,7 +15045,7 @@
                 <a:ea typeface="Apple SD Gothic Neo" pitchFamily="34" charset="-122"/>
                 <a:cs typeface="Apple SD Gothic Neo" pitchFamily="34" charset="-120"/>
               </a:rPr>
-              <a:t>Foundry Agent Service로 에이전트를 만들고 배포</a:t>
+              <a:t>Microsoft Foundry Agent Service로 에이전트를 만들고 배포</a:t>
             </a:r>
             <a:endParaRPr lang="en-US" sz="1150" dirty="0"/>
           </a:p>
@@ -15485,7 +15485,7 @@
                 <a:ea typeface="Apple SD Gothic Neo" pitchFamily="34" charset="-122"/>
                 <a:cs typeface="Apple SD Gothic Neo" pitchFamily="34" charset="-120"/>
               </a:rPr>
-              <a:t>Content Safety로 안전 가드레일 내장</a:t>
+              <a:t>Azure AI Content Safety로 안전 가드레일 내장</a:t>
             </a:r>
             <a:endParaRPr lang="en-US" sz="1150" dirty="0"/>
           </a:p>
@@ -17145,7 +17145,7 @@
                 <a:ea typeface="Apple SD Gothic Neo" pitchFamily="34" charset="-122"/>
                 <a:cs typeface="Apple SD Gothic Neo" pitchFamily="34" charset="-120"/>
               </a:rPr>
-              <a:t>Copilot Studio · Microsoft 365 · GitHub Copilot</a:t>
+              <a:t>Microsoft Copilot Studio · Microsoft 365 · GitHub Copilot</a:t>
             </a:r>
             <a:endParaRPr lang="en-US" sz="3000" dirty="0"/>
           </a:p>
@@ -17262,7 +17262,7 @@
                 <a:ea typeface="Apple SD Gothic Neo" pitchFamily="34" charset="-122"/>
                 <a:cs typeface="Apple SD Gothic Neo" pitchFamily="34" charset="-120"/>
               </a:rPr>
-              <a:t>④ Copilot Studio</a:t>
+              <a:t>④ Microsoft Copilot Studio</a:t>
             </a:r>
             <a:endParaRPr lang="en-US" sz="1600" dirty="0"/>
           </a:p>
@@ -17374,7 +17374,7 @@
                 <a:ea typeface="Apple SD Gothic Neo" pitchFamily="34" charset="-122"/>
                 <a:cs typeface="Apple SD Gothic Neo" pitchFamily="34" charset="-120"/>
               </a:rPr>
-              <a:t>M365·Teams로 바로 게시 (GA)</a:t>
+              <a:t>Microsoft 365·Microsoft Teams로 바로 게시 (GA)</a:t>
             </a:r>
             <a:endParaRPr lang="en-US" sz="1100" dirty="0"/>
           </a:p>
@@ -17398,7 +17398,7 @@
                 <a:ea typeface="Apple SD Gothic Neo" pitchFamily="34" charset="-122"/>
                 <a:cs typeface="Apple SD Gothic Neo" pitchFamily="34" charset="-120"/>
               </a:rPr>
-              <a:t>Foundry와 상호운용</a:t>
+              <a:t>Microsoft Foundry와 상호운용</a:t>
             </a:r>
             <a:endParaRPr lang="en-US" sz="1100" dirty="0"/>
           </a:p>
@@ -17576,7 +17576,7 @@
                 <a:ea typeface="Apple SD Gothic Neo" pitchFamily="34" charset="-122"/>
                 <a:cs typeface="Apple SD Gothic Neo" pitchFamily="34" charset="-120"/>
               </a:rPr>
-              <a:t>⑤ M365 · Agent 365</a:t>
+              <a:t>⑤ Microsoft 365 · Microsoft Agent 365</a:t>
             </a:r>
             <a:endParaRPr lang="en-US" sz="1600" dirty="0"/>
           </a:p>
@@ -17664,7 +17664,7 @@
                 <a:ea typeface="Apple SD Gothic Neo" pitchFamily="34" charset="-122"/>
                 <a:cs typeface="Apple SD Gothic Neo" pitchFamily="34" charset="-120"/>
               </a:rPr>
-              <a:t>Teams·Outlook 등 업무 흐름 안에서</a:t>
+              <a:t>Microsoft Teams·Outlook 등 업무 흐름 안에서</a:t>
             </a:r>
             <a:endParaRPr lang="en-US" sz="1100" dirty="0"/>
           </a:p>
@@ -17688,7 +17688,7 @@
                 <a:ea typeface="Apple SD Gothic Neo" pitchFamily="34" charset="-122"/>
                 <a:cs typeface="Apple SD Gothic Neo" pitchFamily="34" charset="-120"/>
               </a:rPr>
-              <a:t>Agent 365로 에이전트를 관리·운영</a:t>
+              <a:t>Microsoft Agent 365로 에이전트를 관리·운영</a:t>
             </a:r>
             <a:endParaRPr lang="en-US" sz="1100" dirty="0"/>
           </a:p>
@@ -17712,7 +17712,7 @@
                 <a:ea typeface="Apple SD Gothic Neo" pitchFamily="34" charset="-122"/>
                 <a:cs typeface="Apple SD Gothic Neo" pitchFamily="34" charset="-120"/>
               </a:rPr>
-              <a:t>Entra·Purview로 통제</a:t>
+              <a:t>Microsoft Entra ID·Microsoft Purview로 통제</a:t>
             </a:r>
             <a:endParaRPr lang="en-US" sz="1100" dirty="0"/>
           </a:p>
@@ -18026,7 +18026,7 @@
                 <a:ea typeface="Apple SD Gothic Neo" pitchFamily="34" charset="-122"/>
                 <a:cs typeface="Apple SD Gothic Neo" pitchFamily="34" charset="-120"/>
               </a:rPr>
-              <a:t>Foundry와 함께 앱·에이전트 구축</a:t>
+              <a:t>Microsoft Foundry와 함께 앱·에이전트 구축</a:t>
             </a:r>
             <a:endParaRPr lang="en-US" sz="1100" dirty="0"/>
           </a:p>
@@ -18486,7 +18486,7 @@
                 <a:ea typeface="Apple SD Gothic Neo" pitchFamily="34" charset="-122"/>
                 <a:cs typeface="Apple SD Gothic Neo" pitchFamily="34" charset="-120"/>
               </a:rPr>
-              <a:t>M365 · Teams · Copilot Studio 앱</a:t>
+              <a:t>Microsoft 365 · Microsoft Teams · Microsoft Copilot Studio 앱</a:t>
             </a:r>
             <a:endParaRPr lang="en-US" sz="1050" dirty="0"/>
           </a:p>
@@ -18617,7 +18617,7 @@
                 <a:ea typeface="Apple SD Gothic Neo" pitchFamily="34" charset="-122"/>
                 <a:cs typeface="Apple SD Gothic Neo" pitchFamily="34" charset="-120"/>
               </a:rPr>
-              <a:t>Foundry Agent Service · Copilot 에이전트</a:t>
+              <a:t>Microsoft Foundry Agent Service · Copilot 에이전트</a:t>
             </a:r>
             <a:endParaRPr lang="en-US" sz="1050" dirty="0"/>
           </a:p>
@@ -18748,7 +18748,7 @@
                 <a:ea typeface="Apple SD Gothic Neo" pitchFamily="34" charset="-122"/>
                 <a:cs typeface="Apple SD Gothic Neo" pitchFamily="34" charset="-120"/>
               </a:rPr>
-              <a:t>Copilot Studio(현업·IT) · Foundry(개발자)</a:t>
+              <a:t>Microsoft Copilot Studio(현업·IT) · Microsoft Foundry(개발자)</a:t>
             </a:r>
             <a:endParaRPr lang="en-US" sz="1050" dirty="0"/>
           </a:p>
@@ -19296,7 +19296,7 @@
                 <a:ea typeface="Apple SD Gothic Neo" pitchFamily="34" charset="-122"/>
                 <a:cs typeface="Apple SD Gothic Neo" pitchFamily="34" charset="-120"/>
               </a:rPr>
-              <a:t>Entra · Purview</a:t>
+              <a:t>Microsoft Entra ID · Microsoft Purview</a:t>
             </a:r>
             <a:endParaRPr lang="en-US" sz="950" dirty="0"/>
           </a:p>
@@ -19316,7 +19316,7 @@
                 <a:ea typeface="Apple SD Gothic Neo" pitchFamily="34" charset="-122"/>
                 <a:cs typeface="Apple SD Gothic Neo" pitchFamily="34" charset="-120"/>
               </a:rPr>
-              <a:t>Defender · Monitor</a:t>
+              <a:t>Microsoft Defender · Azure Monitor</a:t>
             </a:r>
             <a:endParaRPr lang="en-US" sz="950" dirty="0"/>
           </a:p>
@@ -20551,7 +20551,7 @@
                 <a:ea typeface="Apple SD Gothic Neo" pitchFamily="34" charset="-122"/>
                 <a:cs typeface="Apple SD Gothic Neo" pitchFamily="34" charset="-120"/>
               </a:rPr>
-              <a:t>Foundry·Copilot Studio로 제작</a:t>
+              <a:t>Microsoft Foundry·Microsoft Copilot Studio로 제작</a:t>
             </a:r>
             <a:endParaRPr lang="en-US" sz="1100" dirty="0"/>
           </a:p>
@@ -21640,7 +21640,7 @@
                           <a:ea typeface="Apple SD Gothic Neo" pitchFamily="34" charset="-122"/>
                           <a:cs typeface="Apple SD Gothic Neo" pitchFamily="34" charset="-120"/>
                         </a:rPr>
-                        <a:t>M365 · Teams · Copilot Studio 앱</a:t>
+                        <a:t>Microsoft 365 · Microsoft Teams · Microsoft Copilot Studio 앱</a:t>
                       </a:r>
                       <a:endParaRPr lang="en-US" sz="1150" dirty="0">
                         <a:latin typeface="Apple SD Gothic Neo" charset="0"/>
@@ -21810,7 +21810,7 @@
                           <a:ea typeface="Apple SD Gothic Neo" pitchFamily="34" charset="-122"/>
                           <a:cs typeface="Apple SD Gothic Neo" pitchFamily="34" charset="-120"/>
                         </a:rPr>
-                        <a:t>Foundry Agent Service · Copilot 에이전트</a:t>
+                        <a:t>Microsoft Foundry Agent Service · Copilot 에이전트</a:t>
                       </a:r>
                       <a:endParaRPr lang="en-US" sz="1150" dirty="0">
                         <a:latin typeface="Apple SD Gothic Neo" charset="0"/>
@@ -21980,7 +21980,7 @@
                           <a:ea typeface="Apple SD Gothic Neo" pitchFamily="34" charset="-122"/>
                           <a:cs typeface="Apple SD Gothic Neo" pitchFamily="34" charset="-120"/>
                         </a:rPr>
-                        <a:t>Copilot Studio · Microsoft Foundry</a:t>
+                        <a:t>Microsoft Copilot Studio · Microsoft Foundry</a:t>
                       </a:r>
                       <a:endParaRPr lang="en-US" sz="1150" dirty="0">
                         <a:latin typeface="Apple SD Gothic Neo" charset="0"/>
@@ -22150,7 +22150,7 @@
                           <a:ea typeface="Apple SD Gothic Neo" pitchFamily="34" charset="-122"/>
                           <a:cs typeface="Apple SD Gothic Neo" pitchFamily="34" charset="-120"/>
                         </a:rPr>
-                        <a:t>Fabric IQ · Work IQ · Foundry IQ · AI Search</a:t>
+                        <a:t>Fabric IQ · Work IQ · Foundry IQ · Azure AI Search</a:t>
                       </a:r>
                       <a:endParaRPr lang="en-US" sz="1150" dirty="0">
                         <a:latin typeface="Apple SD Gothic Neo" charset="0"/>
@@ -24162,7 +24162,7 @@
                 <a:ea typeface="Apple SD Gothic Neo" pitchFamily="34" charset="-122"/>
                 <a:cs typeface="Apple SD Gothic Neo" pitchFamily="34" charset="-120"/>
               </a:rPr>
-              <a:t>Entra Agent ID</a:t>
+              <a:t>Microsoft Entra Agent ID</a:t>
             </a:r>
             <a:endParaRPr lang="en-US" sz="1500" dirty="0"/>
           </a:p>
@@ -24558,7 +24558,7 @@
                 <a:ea typeface="Apple SD Gothic Neo" pitchFamily="34" charset="-122"/>
                 <a:cs typeface="Apple SD Gothic Neo" pitchFamily="34" charset="-120"/>
               </a:rPr>
-              <a:t>Defender for Cloud/AI</a:t>
+              <a:t>Microsoft Defender for Cloud/AI</a:t>
             </a:r>
             <a:endParaRPr lang="en-US" sz="1500" dirty="0"/>
           </a:p>
@@ -25382,7 +25382,7 @@
                           <a:ea typeface="Apple SD Gothic Neo" pitchFamily="34" charset="-122"/>
                           <a:cs typeface="Apple SD Gothic Neo" pitchFamily="34" charset="-120"/>
                         </a:rPr>
-                        <a:t>Microsoft 365 · Teams · Copilot Studio</a:t>
+                        <a:t>Microsoft 365 · Microsoft Teams · Microsoft Copilot Studio</a:t>
                       </a:r>
                       <a:endParaRPr lang="en-US" sz="1100" dirty="0">
                         <a:latin typeface="Apple SD Gothic Neo" charset="0"/>
@@ -25552,7 +25552,7 @@
                           <a:ea typeface="Apple SD Gothic Neo" pitchFamily="34" charset="-122"/>
                           <a:cs typeface="Apple SD Gothic Neo" pitchFamily="34" charset="-120"/>
                         </a:rPr>
-                        <a:t>Agent 365</a:t>
+                        <a:t>Microsoft Agent 365</a:t>
                       </a:r>
                       <a:endParaRPr lang="en-US" sz="1100" dirty="0">
                         <a:latin typeface="Apple SD Gothic Neo" charset="0"/>
@@ -25722,7 +25722,7 @@
                           <a:ea typeface="Apple SD Gothic Neo" pitchFamily="34" charset="-122"/>
                           <a:cs typeface="Apple SD Gothic Neo" pitchFamily="34" charset="-120"/>
                         </a:rPr>
-                        <a:t>Copilot Studio · Microsoft Foundry</a:t>
+                        <a:t>Microsoft Copilot Studio · Microsoft Foundry</a:t>
                       </a:r>
                       <a:endParaRPr lang="en-US" sz="1100" dirty="0">
                         <a:latin typeface="Apple SD Gothic Neo" charset="0"/>
@@ -26572,7 +26572,7 @@
                           <a:ea typeface="Apple SD Gothic Neo" pitchFamily="34" charset="-122"/>
                           <a:cs typeface="Apple SD Gothic Neo" pitchFamily="34" charset="-120"/>
                         </a:rPr>
-                        <a:t>Entra · Purview · Defender · Monitor</a:t>
+                        <a:t>Microsoft Entra ID · Microsoft Purview · Microsoft Defender · Azure Monitor</a:t>
                       </a:r>
                       <a:endParaRPr lang="en-US" sz="1100" dirty="0">
                         <a:latin typeface="Apple SD Gothic Neo" charset="0"/>
@@ -27605,7 +27605,7 @@
                 <a:ea typeface="Apple SD Gothic Neo" pitchFamily="34" charset="-122"/>
                 <a:cs typeface="Apple SD Gothic Neo" pitchFamily="34" charset="-120"/>
               </a:rPr>
-              <a:t>Copilot Studio로 직접 만든 업무 에이전트</a:t>
+              <a:t>Microsoft Copilot Studio로 직접 만든 업무 에이전트</a:t>
             </a:r>
             <a:endParaRPr lang="en-US" sz="1150" dirty="0"/>
           </a:p>
@@ -27803,7 +27803,7 @@
                 <a:ea typeface="Apple SD Gothic Neo" pitchFamily="34" charset="-122"/>
                 <a:cs typeface="Apple SD Gothic Neo" pitchFamily="34" charset="-120"/>
               </a:rPr>
-              <a:t>GitHub Copilot·Foundry로 앱·에이전트 구축</a:t>
+              <a:t>GitHub Copilot·Microsoft Foundry로 앱·에이전트 구축</a:t>
             </a:r>
             <a:endParaRPr lang="en-US" sz="1150" dirty="0"/>
           </a:p>
@@ -28001,7 +28001,7 @@
                 <a:ea typeface="Apple SD Gothic Neo" pitchFamily="34" charset="-122"/>
                 <a:cs typeface="Apple SD Gothic Neo" pitchFamily="34" charset="-120"/>
               </a:rPr>
-              <a:t>Entra·Purview로 안전하게 관리·감사</a:t>
+              <a:t>Microsoft Entra ID·Microsoft Purview로 안전하게 관리·감사</a:t>
             </a:r>
             <a:endParaRPr lang="en-US" sz="1150" dirty="0"/>
           </a:p>
@@ -28602,7 +28602,7 @@
                           <a:ea typeface="Apple SD Gothic Neo" pitchFamily="34" charset="-122"/>
                           <a:cs typeface="Apple SD Gothic Neo" pitchFamily="34" charset="-120"/>
                         </a:rPr>
-                        <a:t>Foundry · AI Search · OneLake</a:t>
+                        <a:t>Microsoft Foundry · Azure AI Search · OneLake</a:t>
                       </a:r>
                       <a:endParaRPr lang="en-US" sz="1150" dirty="0">
                         <a:latin typeface="Apple SD Gothic Neo" charset="0"/>
@@ -28772,7 +28772,7 @@
                           <a:ea typeface="Apple SD Gothic Neo" pitchFamily="34" charset="-122"/>
                           <a:cs typeface="Apple SD Gothic Neo" pitchFamily="34" charset="-120"/>
                         </a:rPr>
-                        <a:t>Copilot Studio · AI Search</a:t>
+                        <a:t>Microsoft Copilot Studio · Azure AI Search</a:t>
                       </a:r>
                       <a:endParaRPr lang="en-US" sz="1150" dirty="0">
                         <a:latin typeface="Apple SD Gothic Neo" charset="0"/>
@@ -28942,7 +28942,7 @@
                           <a:ea typeface="Apple SD Gothic Neo" pitchFamily="34" charset="-122"/>
                           <a:cs typeface="Apple SD Gothic Neo" pitchFamily="34" charset="-120"/>
                         </a:rPr>
-                        <a:t>Copilot Studio · Microsoft 365</a:t>
+                        <a:t>Microsoft Copilot Studio · Microsoft 365</a:t>
                       </a:r>
                       <a:endParaRPr lang="en-US" sz="1150" dirty="0">
                         <a:latin typeface="Apple SD Gothic Neo" charset="0"/>
@@ -29112,7 +29112,7 @@
                           <a:ea typeface="Apple SD Gothic Neo" pitchFamily="34" charset="-122"/>
                           <a:cs typeface="Apple SD Gothic Neo" pitchFamily="34" charset="-120"/>
                         </a:rPr>
-                        <a:t>Agent 365 · Entra · Purview</a:t>
+                        <a:t>Microsoft Agent 365 · Microsoft Entra ID · Microsoft Purview</a:t>
                       </a:r>
                       <a:endParaRPr lang="en-US" sz="1150" dirty="0">
                         <a:latin typeface="Apple SD Gothic Neo" charset="0"/>
@@ -29282,7 +29282,7 @@
                           <a:ea typeface="Apple SD Gothic Neo" pitchFamily="34" charset="-122"/>
                           <a:cs typeface="Apple SD Gothic Neo" pitchFamily="34" charset="-120"/>
                         </a:rPr>
-                        <a:t>Microsoft Fabric · Foundry</a:t>
+                        <a:t>Microsoft Fabric · Microsoft Foundry</a:t>
                       </a:r>
                       <a:endParaRPr lang="en-US" sz="1150" dirty="0">
                         <a:latin typeface="Apple SD Gothic Neo" charset="0"/>
@@ -29452,7 +29452,7 @@
                           <a:ea typeface="Apple SD Gothic Neo" pitchFamily="34" charset="-122"/>
                           <a:cs typeface="Apple SD Gothic Neo" pitchFamily="34" charset="-120"/>
                         </a:rPr>
-                        <a:t>GitHub Copilot · Foundry</a:t>
+                        <a:t>GitHub Copilot · Microsoft Foundry</a:t>
                       </a:r>
                       <a:endParaRPr lang="en-US" sz="1150" dirty="0">
                         <a:latin typeface="Apple SD Gothic Neo" charset="0"/>
@@ -31043,7 +31043,7 @@
                 <a:ea typeface="Apple SD Gothic Neo" pitchFamily="34" charset="-122"/>
                 <a:cs typeface="Apple SD Gothic Neo" pitchFamily="34" charset="-120"/>
               </a:rPr>
-              <a:t>Entra·Purview·Defender로 통제·관측 정착</a:t>
+              <a:t>Microsoft Entra ID·Microsoft Purview·Microsoft Defender로 통제·관측 정착</a:t>
             </a:r>
             <a:endParaRPr lang="en-US" sz="1000" dirty="0"/>
           </a:p>
@@ -36476,7 +36476,7 @@
                 <a:ea typeface="Apple SD Gothic Neo" pitchFamily="34" charset="-122"/>
                 <a:cs typeface="Apple SD Gothic Neo" pitchFamily="34" charset="-120"/>
               </a:rPr>
-              <a:t>이미 M365·GitHub·Fabric을 쓰고 있다면, '지금' 시작하기 가장 가까운 곳은 그 위에 얹히는 Azure입니다.</a:t>
+              <a:t>이미 Microsoft 365·GitHub·Microsoft Fabric을 쓰고 있다면, '지금' 시작하기 가장 가까운 곳은 그 위에 얹히는 Azure입니다.</a:t>
             </a:r>
             <a:endParaRPr lang="en-US" sz="1250" dirty="0"/>
           </a:p>
@@ -38192,7 +38192,7 @@
                 <a:ea typeface="Apple SD Gothic Neo" pitchFamily="34" charset="-122"/>
                 <a:cs typeface="Apple SD Gothic Neo" pitchFamily="34" charset="-120"/>
               </a:rPr>
-              <a:t>설계부터 내장된 책임·안전 — Content Safety · Entra · Purview · Defender</a:t>
+              <a:t>설계부터 내장된 책임·안전 — Azure AI Content Safety · Microsoft Entra ID · Microsoft Purview · Microsoft Defender</a:t>
             </a:r>
             <a:endParaRPr lang="en-US" sz="1200" dirty="0"/>
           </a:p>
@@ -38390,7 +38390,7 @@
                 <a:ea typeface="Apple SD Gothic Neo" pitchFamily="34" charset="-122"/>
                 <a:cs typeface="Apple SD Gothic Neo" pitchFamily="34" charset="-120"/>
               </a:rPr>
-              <a:t>데이터(Fabric·OneLake) → 에이전트(Foundry) → 운영(Monitor)까지 하나의 스택에서</a:t>
+              <a:t>데이터(Microsoft Fabric·OneLake) → 에이전트(Microsoft Foundry) → 운영(Azure Monitor)까지 하나의 스택에서</a:t>
             </a:r>
             <a:endParaRPr lang="en-US" sz="1200" dirty="0"/>
           </a:p>
@@ -38627,7 +38627,7 @@
                 <a:ea typeface="Apple SD Gothic Neo" pitchFamily="34" charset="-122"/>
                 <a:cs typeface="Apple SD Gothic Neo" pitchFamily="34" charset="-120"/>
               </a:rPr>
-              <a:t>이 네 가지가 특히 강한 이유 — 이미 M365·Entra·GitHub·Fabric을 쓰는 조직에겐, 새로 만드는 게 아니라 '쓰던 것' 위에 안전하게 얹힙니다.</a:t>
+              <a:t>이 네 가지가 특히 강한 이유 — 이미 Microsoft 365·Microsoft Entra ID·GitHub·Microsoft Fabric을 쓰는 조직에겐, 새로 만드는 게 아니라 '쓰던 것' 위에 안전하게 얹힙니다.</a:t>
             </a:r>
             <a:endParaRPr lang="en-US" sz="1250" dirty="0"/>
           </a:p>
@@ -39549,7 +39549,7 @@
                 <a:ea typeface="Apple SD Gothic Neo" pitchFamily="34" charset="-122"/>
                 <a:cs typeface="Apple SD Gothic Neo" pitchFamily="34" charset="-120"/>
               </a:rPr>
-              <a:t>M365 · GitHub · Fabric은 연동 가치, 이 기준을 책임지는 엔진은 Azure — 옮기지 않고 연결부터</a:t>
+              <a:t>Microsoft 365 · GitHub · Microsoft Fabric은 연동 가치, 이 기준을 책임지는 엔진은 Azure — 옮기지 않고 연결부터</a:t>
             </a:r>
             <a:endParaRPr lang="en-US" sz="1150" dirty="0"/>
           </a:p>
@@ -39767,7 +39767,7 @@
                 <a:ea typeface="Apple SD Gothic Neo" pitchFamily="34" charset="-122"/>
                 <a:cs typeface="Apple SD Gothic Neo" pitchFamily="34" charset="-120"/>
               </a:rPr>
-              <a:t>Entra(신원) · Purview(데이터) · Defender(위협) · Agent 365(에이전트 통제, GA·2026.5)</a:t>
+              <a:t>Microsoft Entra ID(신원) · Microsoft Purview(데이터) · Microsoft Defender(위협) · Microsoft Agent 365(에이전트 통제, GA·2026.5)</a:t>
             </a:r>
             <a:endParaRPr lang="en-US" sz="1150" dirty="0"/>
           </a:p>
@@ -40577,7 +40577,7 @@
                           <a:ea typeface="Apple SD Gothic Neo" pitchFamily="34" charset="-122"/>
                           <a:cs typeface="Apple SD Gothic Neo" pitchFamily="34" charset="-120"/>
                         </a:rPr>
-                        <a:t>Content Safety · 평가 파이프라인</a:t>
+                        <a:t>Azure AI Content Safety · 평가 파이프라인</a:t>
                       </a:r>
                       <a:endParaRPr lang="en-US" sz="1200" dirty="0">
                         <a:latin typeface="Apple SD Gothic Neo" charset="0"/>
@@ -41087,7 +41087,7 @@
                           <a:ea typeface="Apple SD Gothic Neo" pitchFamily="34" charset="-122"/>
                           <a:cs typeface="Apple SD Gothic Neo" pitchFamily="34" charset="-120"/>
                         </a:rPr>
-                        <a:t>Entra · Purview · Defender 연동</a:t>
+                        <a:t>Microsoft Entra ID · Microsoft Purview · Microsoft Defender 연동</a:t>
                       </a:r>
                       <a:endParaRPr lang="en-US" sz="1200" dirty="0">
                         <a:latin typeface="Apple SD Gothic Neo" charset="0"/>
